--- a/decks/Module_4_Muscles_and_How_They_Contract.pptx
+++ b/decks/Module_4_Muscles_and_How_They_Contract.pptx
@@ -568,7 +568,7 @@
           <a:p>
             <a:r>
               <a:rPr lang="en-US" dirty="0"/>
-              <a:t>Module 4: Muscles and How They Contract. Every pose you teach is built from muscles pulling on bones. This module starts inside the muscle, with the sliding filaments of the sarcomere, and works outward to the three contraction types you meet in every class: the eccentric lower into Chaturanga, the isometric hold of Chair and the concentric press back up. You will learn to name the roles muscles play in a movement, agonist, antagonist, synergist and stabilizer, and to work them out for any pose by asking which joint moves and where gravity pulls. The second half turns to stretching, where yoga lore and science often part ways. You will learn what muscle spindles and Golgi tendon organs actually do, why the classic explanation for PNF stretching is now questioned, and why stretch tolerance is the mainstream explanation for short-term flexibility gains. You will also meet fascia as a real and interesting tissue, without the unsupported claims. The module ends with a pose lab that maps muscle roles in Warrior III and Bridge.</a:t>
+              <a:t/>
             </a:r>
             <a:endParaRPr lang="en-US" dirty="0"/>
           </a:p>
@@ -656,7 +656,7 @@
           <a:p>
             <a:r>
               <a:rPr lang="en-US" dirty="0"/>
-              <a:t>Give the group a moment, then ask someone to explain the answer back in their own words using their fingers: interlace them loosely, then slide them deeper together. The fingers do not get shorter, but the hands get closer. That is the sarcomere. If anyone chose the first option, reassure them it is the most common mistake, even among students who have studied biology, and point back to the relaxed and contracted diagram.</a:t>
+              <a:t/>
             </a:r>
             <a:endParaRPr lang="en-US" dirty="0"/>
           </a:p>
@@ -744,7 +744,7 @@
           <a:p>
             <a:r>
               <a:rPr lang="en-US" dirty="0"/>
-              <a:t>The answer is B: Myosin pulls actin toward the center so the filaments slide past each other. In the sliding filament model the filaments keep their length and slide past each other, drawing the Z discs closer together.</a:t>
+              <a:t/>
             </a:r>
             <a:endParaRPr lang="en-US" dirty="0"/>
           </a:p>
@@ -832,7 +832,7 @@
           <a:p>
             <a:r>
               <a:rPr lang="en-US" dirty="0"/>
-              <a:t>Lesson 4.2: Concentric, eccentric and isometric: lowering through Chaturanga, holding Chair. Contraction means producing tension, not necessarily shortening Concentric: shortens, force beats load. Eccentric: lengthens, load beats force. Isometric: same length Lowering to Chaturanga is eccentric for the triceps; holding Chair is isometric for the quadriceps Ask where gravity pulls to identify the contraction type Eccentric work is strongest and causes the most delayed soreness when unfamiliar Cue breathing during strong isometric holds</a:t>
+              <a:t/>
             </a:r>
             <a:endParaRPr lang="en-US" dirty="0"/>
           </a:p>
@@ -920,7 +920,7 @@
           <a:p>
             <a:r>
               <a:rPr lang="en-US" dirty="0"/>
-              <a:t>Contraction in anatomy means the muscle is actively producing tension. It does not always mean the muscle gets shorter. There are three types. In a concentric contraction the muscle shortens as it works, because its force is greater than the load. In an eccentric contraction the muscle is working but lengthening, because the load is greater than the force and the muscle is acting as a brake. In an isometric contraction the muscle works but its length does not change, because force and load are matched. In yoga the load is almost always gravity acting on body weight. So the quickest way to work out the type is to ask: is this body part moving with gravity, against gravity, or staying still? We will use two poses, Chaturanga and Chair, to make this concrete.</a:t>
+              <a:t/>
             </a:r>
             <a:endParaRPr lang="en-US" dirty="0"/>
           </a:p>
@@ -1008,7 +1008,7 @@
           <a:p>
             <a:r>
               <a:rPr lang="en-US" dirty="0"/>
-              <a:t>Chaturanga is the most repeated strength move in a Vinyasa class, so it is worth understanding. From plank, gravity is trying to drop your chest to the floor. As you lower, the elbows bend. The triceps, which straighten the elbow, are working the whole time, but they are getting longer because gravity is winning slowly. That is an eccentric contraction. The pectoralis major and front of the deltoid do the same at the shoulder. If you pause halfway and hold, those muscles switch to isometric work. If you press back up to plank, they shorten against gravity, which is concentric work. A common surprise for trainees: the triceps is working during the lowering phase even though the elbow is bending. Muscles that control a movement are often the ones whose job is the opposite direction.</a:t>
+              <a:t/>
             </a:r>
             <a:endParaRPr lang="en-US" dirty="0"/>
           </a:p>
@@ -1096,7 +1096,7 @@
           <a:p>
             <a:r>
               <a:rPr lang="en-US" dirty="0"/>
-              <a:t>Chair shows all three contraction types in one pose. Bending the knees to come into Chair is eccentric for the quadriceps and gluteus maximus, because they are lowering you under control against gravity. Holding Chair is isometric: the knee and hip angles do not change, but those muscles are working hard, which is why the thighs burn. Rising out of Chair is concentric, because those same muscles shorten to lift you. Isometric holds are useful. They build strength at a specific joint angle, they are easy to scale by changing the depth, and they let students feel effort without the complexity of movement. One practical point: people often hold their breath during strong isometric work, which raises blood pressure briefly. Cue steady breathing throughout.</a:t>
+              <a:t/>
             </a:r>
             <a:endParaRPr lang="en-US" dirty="0"/>
           </a:p>
@@ -1184,7 +1184,7 @@
           <a:p>
             <a:r>
               <a:rPr lang="en-US" dirty="0"/>
-              <a:t>This slide is the one I want you to be able to reproduce on a whiteboard. The quadriceps are the main muscle in all three phases of Chair. What changes is not which muscle works, but how it works. Lowering is eccentric, holding is isometric, rising is concentric. The same pattern repeats all over a class. In a squat, in lowering from standing into a forward fold, in lowering the chest in Cobra, the muscles that lift you on the way up are usually the same muscles that lower you on the way down, working eccentrically. Students often assume the opposite muscle is doing the lowering. Ask them where gravity is pulling, and the answer usually becomes obvious.</a:t>
+              <a:t/>
             </a:r>
             <a:endParaRPr lang="en-US" dirty="0"/>
           </a:p>
@@ -1272,7 +1272,7 @@
           <a:p>
             <a:r>
               <a:rPr lang="en-US" dirty="0"/>
-              <a:t>Here is a rule of thumb that works in almost every pose. When a body part moves against gravity, the muscles that produce that movement work concentrically. When a body part moves with gravity at a controlled speed, the muscles that would move it the other way work eccentrically as brakes. In Cobra, the erector spinae and other back muscles lift the chest concentrically. On the way down, gravity would drop you, so the same back muscles lengthen under control. One more useful fact: eccentric contractions can handle heavier loads than concentric ones, and unfamiliar eccentric work is the classic cause of delayed onset muscle soreness, the stiffness that peaks a day or two later. A new student who does twenty slow Chaturangas may feel it in the chest and triceps for days. Build volume gradually.</a:t>
+              <a:t/>
             </a:r>
             <a:endParaRPr lang="en-US" dirty="0"/>
           </a:p>
@@ -1360,7 +1360,7 @@
           <a:p>
             <a:r>
               <a:rPr lang="en-US" dirty="0"/>
-              <a:t>Guide the group through this slowly, with knees down as the default and full plank as an option. Lowering for a count of four makes the eccentric phase obvious: you will feel the triceps and chest working hard even though the elbows are bending. Holding halfway turns the same muscles isometric. Pressing back to plank is concentric, and many people find it the hardest phase, because concentric contractions produce less force than eccentric ones. Afterwards ask the group which phase felt strongest and which felt hardest. Most will say they could lower more slowly than they could press up. That is the eccentric advantage in action, and it is also why slow lowering is a good progression toward a full Chaturanga for students still building strength.</a:t>
+              <a:t/>
             </a:r>
             <a:endParaRPr lang="en-US" dirty="0"/>
           </a:p>
@@ -1448,7 +1448,7 @@
           <a:p>
             <a:r>
               <a:rPr lang="en-US" dirty="0"/>
-              <a:t>This is the key question of the lesson. If people chose the first option, ask them what would happen if the triceps truly relaxed during the lower. The answer is a face plant. Remind the group that working and shortening are not the same thing: the triceps work the whole way down, but they get longer as they do so.</a:t>
+              <a:t/>
             </a:r>
             <a:endParaRPr lang="en-US" dirty="0"/>
           </a:p>
@@ -1536,7 +1536,7 @@
           <a:p>
             <a:r>
               <a:rPr lang="en-US" dirty="0"/>
-              <a:t>Describe the structure of skeletal muscle from whole muscle to sarcomere and explain the sliding filament model in plain words Identify concentric, eccentric and isometric contractions in Chaturanga, Chair and other common poses Assign agonist, antagonist, synergist and stabilizer roles for a given joint action in a pose Explain the stretch reflex, reciprocal inhibition and the Golgi tendon organ, and state what current evidence says about how PNF works Distinguish the nervous system and tissue contributions to flexibility and cue end-range strength for flexible students Separate supported from unsupported claims about fascia and choose accurate cueing language</a:t>
+              <a:t/>
             </a:r>
             <a:endParaRPr lang="en-US" dirty="0"/>
           </a:p>
@@ -1624,7 +1624,7 @@
           <a:p>
             <a:r>
               <a:rPr lang="en-US" dirty="0"/>
-              <a:t>The answer is C: Contracting eccentrically, lengthening under control. Gravity is bending the elbows and the triceps lengthen while working to control the descent, which is an eccentric contraction.</a:t>
+              <a:t/>
             </a:r>
             <a:endParaRPr lang="en-US" dirty="0"/>
           </a:p>
@@ -1712,7 +1712,7 @@
           <a:p>
             <a:r>
               <a:rPr lang="en-US" dirty="0"/>
-              <a:t>Lesson 4.3: Agonist, antagonist, synergist and stabilizer. Agonist produces the movement; antagonist opposes it and usually lengthens Synergists assist; stabilizers hold nearby joints steady In Chair the quadriceps are the knee agonist in all three phases Roles depend on the movement: name the joint and action first Two-joint muscles can play different roles at each joint Cue the action a stabilizer produces rather than naming the muscle</a:t>
+              <a:t/>
             </a:r>
             <a:endParaRPr lang="en-US" dirty="0"/>
           </a:p>
@@ -1800,7 +1800,7 @@
           <a:p>
             <a:r>
               <a:rPr lang="en-US" dirty="0"/>
-              <a:t>Because muscles only pull, they work in teams. Anatomists describe four roles. The agonist, also called the prime mover, is the main muscle producing a movement. To bend the elbow, that is mainly the biceps brachii, with the brachialis underneath. The antagonist is the muscle that produces the opposite movement, here the triceps, and during elbow bending it lengthens and allows the motion. A synergist helps the agonist, either by adding force, like the brachioradialis in the forearm, or by cancelling an unwanted side action. A stabilizer, sometimes called a fixator, holds a nearby joint steady so the agonist has a firm base to pull from. When you bend the elbow, the rotator cuff and shoulder blade muscles keep the shoulder still. The important word in all of this is role: these are jobs, not fixed identities.</a:t>
+              <a:t/>
             </a:r>
             <a:endParaRPr lang="en-US" dirty="0"/>
           </a:p>
@@ -1888,7 +1888,7 @@
           <a:p>
             <a:r>
               <a:rPr lang="en-US" dirty="0"/>
-              <a:t>Let us apply the four roles to Chair at the knee. The quadriceps are the agonist for knee extension. They lower you eccentrically, hold you isometrically and lift you concentrically. The hamstrings are the antagonist at the knee, because they bend the knee. In Chair they are not doing much at the knee, though they do help at the hip, which is a good reminder that a muscle crossing two joints can have different roles at each one. The gluteus medius and the small deep hip rotators act as stabilizers, keeping the thigh from collapsing inward so the knee tracks over the second toe. When a student's knees drift together in Chair, it is often a stabilizer that needs attention, not the prime mover.</a:t>
+              <a:t/>
             </a:r>
             <a:endParaRPr lang="en-US" dirty="0"/>
           </a:p>
@@ -1976,7 +1976,7 @@
           <a:p>
             <a:r>
               <a:rPr lang="en-US" dirty="0"/>
-              <a:t>A common trap in teacher trainings is memorizing a single label for each muscle, as if the hamstrings were always antagonists. Roles depend on the movement. If you straighten the elbow against resistance, the triceps become the agonist and the biceps the antagonist. The hamstrings are agonists for hip extension in Bridge and antagonists to the quadriceps at the knee in Chair. Muscles that cross two joints, such as the rectus femoris and the hamstrings, can do different things at each joint at the same time. The clean way to think it through is always the same: name the joint, name the movement, then ask which muscle produces it and which one opposes it. Look at the front leg in Warrior II. Name the joint, the knee, and the load, gravity bending it, and the roles follow.</a:t>
+              <a:t/>
             </a:r>
             <a:endParaRPr lang="en-US" dirty="0"/>
           </a:p>
@@ -2064,7 +2064,7 @@
           <a:p>
             <a:r>
               <a:rPr lang="en-US" dirty="0"/>
-              <a:t>Stabilizers rarely get the credit, but they are what makes a pose look effortless. In Downward Dog, serratus anterior, which wraps around the side ribs under the shoulder blade, keeps the shoulder blades flat on the ribcage and rotated upward, so the arms can take weight. The rotator cuff, four small muscles around the shoulder, keeps the ball of the upper arm bone centered in its shallow socket. In the trunk, deep abdominal muscles tend to stiffen the torso just before and during limb movement, giving the limbs a stable base. When a stabilizer is not doing its job, you usually see it as wobble, a shoulder blade that lifts off the ribs, or a joint that collapses. Your cue in those moments often targets the stabilizer, not the obvious prime mover.</a:t>
+              <a:t/>
             </a:r>
             <a:endParaRPr lang="en-US" dirty="0"/>
           </a:p>
@@ -2152,7 +2152,7 @@
           <a:p>
             <a:r>
               <a:rPr lang="en-US" dirty="0"/>
-              <a:t>Use a wall for balance if needed. On one leg, straighten the standing knee firmly and put a hand on the front of the thigh: the quadriceps are the agonist for holding the knee straight. Slide the hand round to the back of the thigh: the hamstrings, the antagonist, are softer. Now, without actually bending, press the standing heel into the floor and draw it slightly back, as if you wanted to bend the knee. The hamstrings firm up. You have just switched which muscle is working at the same joint without moving. This is the simplest way to show students that agonist and antagonist are jobs that swap, and it is a useful way to wake up the hamstrings for Bridge later in the module.</a:t>
+              <a:t/>
             </a:r>
             <a:endParaRPr lang="en-US" dirty="0"/>
           </a:p>
@@ -2240,7 +2240,7 @@
           <a:p>
             <a:r>
               <a:rPr lang="en-US" dirty="0"/>
-              <a:t>Most students do not know where their gluteus medius is, and naming it rarely helps in the moment. What helps is cueing the action the stabilizer produces. In Warrior II, asking students to draw the front knee toward the little-toe side of the foot invites the hip abductors and external rotators to work, and the knee tends to settle over the ankle. Pressing the outer edge of the back foot down does something similar for the back leg. Use the anatomy to choose the cue, and use plain action words to deliver it. You can always name the muscle afterwards for students who are curious. That is the pattern for the rest of this training: anatomy in your head, action in your mouth.</a:t>
+              <a:t/>
             </a:r>
             <a:endParaRPr lang="en-US" dirty="0"/>
           </a:p>
@@ -2328,7 +2328,7 @@
           <a:p>
             <a:r>
               <a:rPr lang="en-US" dirty="0"/>
-              <a:t>Follow up by asking which contraction type the quadriceps are using in the hold (isometric) and on the way down (eccentric). That links this lesson to the previous one. If time allows, ask what role the gluteus medius plays in Chair. The answer is stabilizer, keeping the knees from drifting inward.</a:t>
+              <a:t/>
             </a:r>
             <a:endParaRPr lang="en-US" dirty="0"/>
           </a:p>
@@ -2416,7 +2416,7 @@
           <a:p>
             <a:r>
               <a:rPr lang="en-US" dirty="0"/>
-              <a:t>The answer is A: Quadriceps. The quadriceps control the knee against gravity in every phase of Chair, so they are the agonist; the hamstrings are the antagonist at the knee.</a:t>
+              <a:t/>
             </a:r>
             <a:endParaRPr lang="en-US" dirty="0"/>
           </a:p>
@@ -2504,7 +2504,7 @@
           <a:p>
             <a:r>
               <a:rPr lang="en-US" dirty="0"/>
-              <a:t>Lesson 4.1: Muscle structure and how a muscle shortens. Skeletal muscle is voluntary, striated and attached to bone by tendons Hierarchy: muscle, fascicle, fiber, myofibril, sarcomere Myosin pulls actin toward the sarcomere center; the filaments slide, they do not shrink Calcium switches contraction on; ATP lets myosin release and reset Force is graded by recruiting more motor units and firing them faster Muscles only pull, so movement back the other way needs another muscle or gravity</a:t>
+              <a:t/>
             </a:r>
             <a:endParaRPr lang="en-US" dirty="0"/>
           </a:p>
@@ -2592,7 +2592,7 @@
           <a:p>
             <a:r>
               <a:rPr lang="en-US" dirty="0"/>
-              <a:t>Lesson 4.4: Reciprocal inhibition, the stretch reflex and the Golgi tendon organ. Spindles sense length and speed; GTOs sense tension Stretch reflex: fast stretch, spindle fires, same muscle contracts Reciprocal inhibition damps the antagonist; real, but its added benefit in slow stretches is modest GTOs give continuous force feedback, not just an emergency cutoff PNF improves short-term range; the GTO explanation is questioned and stretch tolerance is the leading explanation Enter stretches slowly and use moderate effort for contract-relax</a:t>
+              <a:t/>
             </a:r>
             <a:endParaRPr lang="en-US" dirty="0"/>
           </a:p>
@@ -2680,7 +2680,7 @@
           <a:p>
             <a:r>
               <a:rPr lang="en-US" dirty="0"/>
-              <a:t>Muscles are not just motors, they are also sense organs. Two sensors matter most for stretching. Muscle spindles are tiny capsules lying parallel to the ordinary fibers in the muscle belly. They report how long the muscle is and how fast that length is changing. Golgi tendon organs, often shortened to GTOs, sit in series at the junction between muscle and tendon, and they report tension, especially the tension produced when the muscle contracts. Both send signals along sensory nerves into the spinal cord. Much of that information never reaches conscious awareness, but it feeds reflexes and your sense of where your body is in space, called proprioception. When you balance in Tree with your eyes closed, spindles and GTOs are a large part of how you know where your limbs are. Take a minute with the diagram: sensory in green, motor in red, inhibition in amber.</a:t>
+              <a:t/>
             </a:r>
             <a:endParaRPr lang="en-US" dirty="0"/>
           </a:p>
@@ -2768,7 +2768,7 @@
           <a:p>
             <a:r>
               <a:rPr lang="en-US" dirty="0"/>
-              <a:t>This comparison comes up in every anatomy exam and many teacher trainings, so make it solid. The spindle sits in the belly of the muscle, alongside the fibers, and senses stretch: how far and how fast. Its fast sensory nerve, called Ia, connects directly to the motor neurons of the same muscle and excites them. The Golgi tendon organ sits where the muscle joins its tendon and senses tension. Its nerve, called Ib, connects through an inhibitory interneuron and tends to reduce the activity of the same muscle. Older textbooks described the GTO as an emergency cutoff that only fires at dangerous loads. We now know it responds to quite small contraction forces and provides continuous force feedback during ordinary movement. Keep that correction in mind for when we reach PNF stretching.</a:t>
+              <a:t/>
             </a:r>
             <a:endParaRPr lang="en-US" dirty="0"/>
           </a:p>
@@ -2856,7 +2856,7 @@
           <a:p>
             <a:r>
               <a:rPr lang="en-US" dirty="0"/>
-              <a:t>The stretch reflex is the loop you see when a doctor taps below the kneecap. The tap briefly stretches the quadriceps, the spindles fire, the Ia nerve excites the quadriceps motor neurons in the spinal cord, and the leg kicks. The loop has just one synapse, so it is very fast. The same reflex operates in yoga. A quick or bouncing stretch, such as dropping hard into a forward fold or Triangle, makes spindles fire strongly and the stretched muscle contracts against you. The reflex is sensitive to speed, so a slow, steady entry keeps it quiet. That is the real reason ballistic bouncing is discouraged in general classes. It is not dangerous for everyone, and athletes train it deliberately, but for most students slow is both more comfortable and more effective.</a:t>
+              <a:t/>
             </a:r>
             <a:endParaRPr lang="en-US" dirty="0"/>
           </a:p>
@@ -2944,7 +2944,7 @@
           <a:p>
             <a:r>
               <a:rPr lang="en-US" dirty="0"/>
-              <a:t>Look again at the diagram. The Ia nerve from the spindle does two things in the spinal cord. It excites the motor neurons of its own muscle, and through a small inhibitory interneuron it damps the motor neurons of the opposing muscle. This is reciprocal inhibition, and it is real, well established physiology. It lets you move smoothly instead of having opposing muscles fight each other. Yoga teachers often use it as a stretching cue: engage the quadriceps in Down Dog or a forward fold so the hamstrings let go. That cue can help, and students often report a sense of release. Be modest about the mechanism, though. In a slow, relaxed stretch the hamstrings are usually electrically quiet already, so there is not much contraction left to inhibit. Much of the benefit is likely a change in how the stretch feels.</a:t>
+              <a:t/>
             </a:r>
             <a:endParaRPr lang="en-US" dirty="0"/>
           </a:p>
@@ -3032,7 +3032,7 @@
           <a:p>
             <a:r>
               <a:rPr lang="en-US" dirty="0"/>
-              <a:t>PNF stands for proprioceptive neuromuscular facilitation. The best known version, contract-relax, has you contract the muscle being stretched for a few seconds, relax, then move further into the stretch. It works: studies consistently show short-term range gains, often a little larger than static stretching alone. For decades the explanation was autogenic inhibition: the contraction fires the Golgi tendon organs, which inhibit the same muscle so it relaxes more deeply. Current research questions this. The inhibition after a contraction lasts only a very short time, and recordings of muscle activity do not show the stretched muscle staying more relaxed during the subsequent stretch. The mainstream explanation now is that PNF increases stretch tolerance: the same stretch feels less intense, so people go further. So teach PNF if you like it, but do not teach the GTO story as settled fact.</a:t>
+              <a:t/>
             </a:r>
             <a:endParaRPr lang="en-US" dirty="0"/>
           </a:p>
@@ -3120,7 +3120,7 @@
           <a:p>
             <a:r>
               <a:rPr lang="en-US" dirty="0"/>
-              <a:t>Guide this gently and emphasize moderate effort. Pressing the heels into the floor contracts the hamstrings without moving, an isometric contraction of the muscle being stretched. Keep it to roughly a third of maximum effort, because hard contractions at long muscle lengths are where hamstring strains are more likely. After relaxing, most people find they can fold a little further. Ask the group to report not only whether they went further, but whether the stretch felt different. Many will say it felt less sharp or less alarming at the same depth. That is the stretch tolerance effect we just discussed, and it is a nice way to let trainees experience the current evidence rather than just hear about it. Repeat two or three times at most.</a:t>
+              <a:t/>
             </a:r>
             <a:endParaRPr lang="en-US" dirty="0"/>
           </a:p>
@@ -3208,7 +3208,7 @@
           <a:p>
             <a:r>
               <a:rPr lang="en-US" dirty="0"/>
-              <a:t>Use this to model how to talk about science that has moved on. The older explanation is not silly, it was a reasonable hypothesis, but newer measurements do not support it well. Encourage trainees to say something like: we used to think this, and now the evidence points more to that. It is honest and it builds credibility with students who have read about these topics.</a:t>
+              <a:t/>
             </a:r>
             <a:endParaRPr lang="en-US" dirty="0"/>
           </a:p>
@@ -3296,7 +3296,7 @@
           <a:p>
             <a:r>
               <a:rPr lang="en-US" dirty="0"/>
-              <a:t>The answer is B: It improves short-term range mainly by increasing tolerance to the stretch. PNF reliably improves short-term range, but the GTO inhibition explanation is questioned; increased stretch tolerance is the leading explanation.</a:t>
+              <a:t/>
             </a:r>
             <a:endParaRPr lang="en-US" dirty="0"/>
           </a:p>
@@ -3384,7 +3384,7 @@
           <a:p>
             <a:r>
               <a:rPr lang="en-US" dirty="0"/>
-              <a:t>Lesson 4.5: What flexibility is: nervous system tolerance and tissue length. Flexibility depends on tissue properties and on nervous system tolerance Short-term gains come mainly from increased stretch tolerance (sensory theory) Long-term gains need regular practice; tissue changes are real but modest and debated Bone shape and compression set limits that stretching cannot change A pinching hard stop is not a stretch Hypermobile students need control and strength at end range, not more range</a:t>
+              <a:t/>
             </a:r>
             <a:endParaRPr lang="en-US" dirty="0"/>
           </a:p>
@@ -3472,7 +3472,7 @@
           <a:p>
             <a:r>
               <a:rPr lang="en-US" dirty="0"/>
-              <a:t>Your body has three kinds of muscle. Cardiac muscle is the heart. Smooth muscle lines hollow organs such as the gut, the bladder and the blood vessels. Neither of those takes instructions from a yoga teacher. The third kind, skeletal muscle, is the one you cue every class. It is called skeletal because it attaches to bones, usually through a tendon, and it is voluntary, which means you can choose to contract it. Skeletal muscle does three jobs that matter on the mat: it moves joints, it holds positions against gravity, and it makes heat, which is part of why a strong standing sequence warms the room. Even in Mountain pose, muscles in the legs and trunk make tiny, constant adjustments to keep you upright. Standing still is not the same as resting.</a:t>
+              <a:t/>
             </a:r>
             <a:endParaRPr lang="en-US" dirty="0"/>
           </a:p>
@@ -3560,7 +3560,7 @@
           <a:p>
             <a:r>
               <a:rPr lang="en-US" dirty="0"/>
-              <a:t>Flexibility, the range of motion available at a joint, is often imagined as a purely mechanical property, as if muscles were strips of elastic that we stretch longer. There are two ingredients. One is the tissue itself: the muscle-tendon unit, joint capsule, ligaments, skin and even nerves, and how stiff they are. The other is the nervous system: how much stretch sensation your brain is willing to accept before it says stop. In most people the end of a stretch is set by sensation. You stop because it feels like enough, not because tissue is at breaking point. A striking observation supports this: range of motion often increases when a person is under general anesthesia, when the nervous system's protective input is switched off. That does not mean tissue is irrelevant, but it shows how much the nervous system is involved.</a:t>
+              <a:t/>
             </a:r>
             <a:endParaRPr lang="en-US" dirty="0"/>
           </a:p>
@@ -3648,7 +3648,7 @@
           <a:p>
             <a:r>
               <a:rPr lang="en-US" dirty="0"/>
-              <a:t>If you hold a forward fold for a minute you will usually go a little further by the end. The traditional story was that the muscle had lengthened. Careful studies measured the force needed to reach a given angle, and in the short term that force barely changes. In other words, the muscle is not meaningfully longer or less stiff. What changes is that people tolerate more stretch before they call it enough. This is called the sensory theory, or the stretch tolerance model, and it is the current mainstream explanation for short-term gains in flexibility. It is good news for teaching. It means flexibility work is partly training the nervous system to feel safe, which fits naturally with slow breathing, comfortable positions and a calm voice. It also means forcing a stretch works against the very system you are trying to calm.</a:t>
+              <a:t/>
             </a:r>
             <a:endParaRPr lang="en-US" dirty="0"/>
           </a:p>
@@ -3736,7 +3736,7 @@
           <a:p>
             <a:r>
               <a:rPr lang="en-US" dirty="0"/>
-              <a:t>Short-term and long-term changes are different stories. Within a session, gains appear in minutes, come mainly from increased tolerance and fade within hours. Over weeks of regular stretching, range increases more durably. Tolerance is still a large part of that, but some studies also find changes in the muscle-tendon unit, such as reduced stiffness or possibly longer muscle fascicles, particularly with strength training at long muscle lengths. The evidence on exactly how much tissue changes is mixed, and researchers are still arguing about it. What is clear is that consistency matters more than intensity. A few minutes most days beats one heroic session a week. And like strength, flexibility tends to slip back when the practice stops.</a:t>
+              <a:t/>
             </a:r>
             <a:endParaRPr lang="en-US" dirty="0"/>
           </a:p>
@@ -3824,7 +3824,7 @@
           <a:p>
             <a:r>
               <a:rPr lang="en-US" dirty="0"/>
-              <a:t>When a student cannot get into a shape, the tempting explanation is tight muscles. Sometimes that is true. Often it is not. Bone shape differs a great deal between people. The depth and angle of the hip socket and the angle of the thigh bone's neck vary, which changes how far a hip can open in Warrior II or rotate in Pigeon, and no amount of stretching changes bone. Compression is another limit: in Child's pose the thighs meet the belly. The joint capsule, ligaments and even nerves can limit range; the sciatic nerve is often part of what you feel in a deep forward fold. A useful teaching distinction is sensation. A stretch is felt along the length of a tissue. A hard stop, especially with a pinching feeling at the front of the joint, suggests compression. Pushing through compression is not flexibility training.</a:t>
+              <a:t/>
             </a:r>
             <a:endParaRPr lang="en-US" dirty="0"/>
           </a:p>
@@ -3912,7 +3912,7 @@
           <a:p>
             <a:r>
               <a:rPr lang="en-US" dirty="0"/>
-              <a:t>Yoga tends to reward flexibility, so very bendy students can look like the most advanced people in the room. Some of them have generalized joint hypermobility, which means their joints move beyond typical ranges. As a teacher you do not diagnose it, but you can notice it and cue for it. In Triangle, a hypermobile front knee may lock back beyond straight, hanging on the ligaments. The goal for these students is not more range, it is control of the range they already have. Cues that ask them to hold back from the end of range and make it strong shift the load from passive tissues to muscles. For stiff students, the same idea applies in reverse: active range work, such as strength at the end of a lunge, tends to give more usable flexibility than passive hanging alone.</a:t>
+              <a:t/>
             </a:r>
             <a:endParaRPr lang="en-US" dirty="0"/>
           </a:p>
@@ -4000,7 +4000,7 @@
           <a:p>
             <a:r>
               <a:rPr lang="en-US" dirty="0"/>
-              <a:t>This exercise lets trainees feel the sensory theory for themselves. Ask them to stop at the first clear stretch, not their deepest point, and to note a landmark such as where the fingertips reach on the shins. Rate the intensity. After a minute of slow breathing, rate it again at exactly the same depth. Most people report the number has fallen. Nothing structural has changed in that minute, but the sensation has. Then invite them to move to the depth that matches their original rating, and notice the new landmark. Afterwards, discuss what that means for teaching: gains in a class are real, but they are mainly about feeling safe in the stretch, which is why breath, pace and tone of voice matter so much.</a:t>
+              <a:t/>
             </a:r>
             <a:endParaRPr lang="en-US" dirty="0"/>
           </a:p>
@@ -4088,7 +4088,7 @@
           <a:p>
             <a:r>
               <a:rPr lang="en-US" dirty="0"/>
-              <a:t>Link this back to the PNF question from the last lesson: both point to the same idea. Flexibility within a session is mostly about the nervous system's tolerance. Ask the group how they might phrase this for a student in plain words, for example: your body is getting used to the stretch and letting you go further.</a:t>
+              <a:t/>
             </a:r>
             <a:endParaRPr lang="en-US" dirty="0"/>
           </a:p>
@@ -4176,7 +4176,7 @@
           <a:p>
             <a:r>
               <a:rPr lang="en-US" dirty="0"/>
-              <a:t>The answer is B: The nervous system now tolerates more stretch sensation. Short-term range gains are best explained by increased stretch tolerance; muscle length and stiffness change little in one session.</a:t>
+              <a:t/>
             </a:r>
             <a:endParaRPr lang="en-US" dirty="0"/>
           </a:p>
@@ -4264,7 +4264,7 @@
           <a:p>
             <a:r>
               <a:rPr lang="en-US" dirty="0"/>
-              <a:t>Lesson 4.6: Fascia without the hype. Fascia is collagen-rich connective tissue that wraps every level of muscle It transmits force, lets structures glide and is richly innervated Hands and rollers cannot release or permanently lengthen dense fascia Short-term release after rolling or massage is mostly a nervous system effect No evidence that fascia stores emotions or that poses rehydrate it Describe sensation in cues rather than promising tissue changes</a:t>
+              <a:t/>
             </a:r>
             <a:endParaRPr lang="en-US" dirty="0"/>
           </a:p>
@@ -4352,7 +4352,7 @@
           <a:p>
             <a:r>
               <a:rPr lang="en-US" dirty="0"/>
-              <a:t>Fascia is real, important tissue, and it deserves better than the hype it often gets. It is connective tissue, made mostly of collagen fibers in a watery ground substance, that wraps, separates and links structures throughout the body. Look back at the muscle hierarchy. Each level is wrapped: the whole muscle by the epimysium, each fascicle by the perimysium and each fiber by the endomysium. These wrappings merge at the ends of the muscle to form the tendon. Deep fascia forms tough sheets, such as the thoracolumbar fascia across the low back, the fascia lata around the thigh, including the iliotibial band, and the plantar fascia under the foot. Superficial fascia is a looser layer under the skin, mixed with fat. When anatomists say fascia, they may mean any of these, which is part of why claims about fascia get confused.</a:t>
+              <a:t/>
             </a:r>
             <a:endParaRPr lang="en-US" dirty="0"/>
           </a:p>
@@ -4440,7 +4440,7 @@
           <a:p>
             <a:r>
               <a:rPr lang="en-US" dirty="0"/>
-              <a:t>Think of a muscle as boxes inside boxes. The whole muscle, say the quadriceps you feel in Chair, is an organ wrapped in connective tissue. Inside it are bundles called fascicles, which you can see as the grain in a piece of meat. Each fascicle holds many muscle fibers. A fiber is a single muscle cell, but an unusual one: it is long, often several centimeters, and has many nuclei. Inside each fiber are thread-like myofibrils, and each myofibril is a chain of tiny repeating units called sarcomeres, which give skeletal muscle its striped look under a microscope. The sarcomere is where the shortening actually happens. Everything larger simply adds up millions of sarcomeres working in series and side by side.</a:t>
+              <a:t/>
             </a:r>
             <a:endParaRPr lang="en-US" dirty="0"/>
           </a:p>
@@ -4528,7 +4528,7 @@
           <a:p>
             <a:r>
               <a:rPr lang="en-US" dirty="0"/>
-              <a:t>Fascia has several well supported functions. It transmits force: most obviously through tendons and aponeuroses, but also sideways between neighboring muscles, so a muscle's pull is not entirely confined to its own tendon. The thoracolumbar fascia, for example, links the latissimus dorsi, the gluteus maximus and deep back muscles, which is relevant in backbends like Cobra. Fascia separates structures and lets them glide past one another, which is why skin slides over the thigh when you bend the knee. It is richly supplied with sensory nerve endings, so it contributes to proprioception and can be a source of pain, and there is research interest in the thoracolumbar fascia and low back pain. Like tendon and ligament, it adapts to loading over months. None of this requires hype to be interesting.</a:t>
+              <a:t/>
             </a:r>
             <a:endParaRPr lang="en-US" dirty="0"/>
           </a:p>
@@ -4616,7 +4616,7 @@
           <a:p>
             <a:r>
               <a:rPr lang="en-US" dirty="0"/>
-              <a:t>Here is the honest scorecard. Supported: fascia transmits force, links muscles into continuous sheets in some regions, is well innervated and adapts slowly. Not supported: the idea that massage, foam rolling or a yoga pose can release, melt or permanently lengthen dense fascia. Studies estimating the force needed to deform tissue like the iliotibial band found it far beyond anything hands or a roller can apply. The short-term feeling of release after rolling or massage is real, but it is best explained by nervous system changes and fluid shifts, much like stretch tolerance. The claim that fascia stores emotions or trauma has no scientific support. Some anatomical continuity along so-called myofascial lines has been found in dissection, but how much it matters for movement is still debated. It is fine to say we do not know yet.</a:t>
+              <a:t/>
             </a:r>
             <a:endParaRPr lang="en-US" dirty="0"/>
           </a:p>
@@ -4704,7 +4704,7 @@
           <a:p>
             <a:r>
               <a:rPr lang="en-US" dirty="0"/>
-              <a:t>This is a gentle exploration, not a technique. Pinching a fold of skin on the thigh and bending the knee lets trainees feel the superficial layers gliding over deeper ones. Then a long overhead reach in Mountain produces sensation along the side of the body, from the armpit to the waist and often down toward the hip. That spread of sensation reflects how tissues are connected, both through muscles such as the latissimus dorsi and through fascial sheets. It is also a good opportunity to practice honest language. We can say the side body feels long and open. We should not say we released the fascia, because nothing measurable happened to the fascia in those few seconds. Ask trainees to describe the sensation in their own words without using the word release.</a:t>
+              <a:t/>
             </a:r>
             <a:endParaRPr lang="en-US" dirty="0"/>
           </a:p>
@@ -4792,7 +4792,7 @@
           <a:p>
             <a:r>
               <a:rPr lang="en-US" dirty="0"/>
-              <a:t>Language matters because students repeat what we say, and they take it into conversations with their doctors and physiotherapists. Compare two cues in Down Dog. One says: feel the sensation spread along the whole back line of your body. That is an accurate description of what many people feel. The other says: melt the fascia along the back of your legs. That is a claim about tissue that is not supported. The first cue is just as inviting and it will never need to be walked back. The same applies to foam rolling or massage in a workshop: say it may help you feel looser and move more comfortably, which is true, rather than it breaks up adhesions, which is not. Honest cues are also a mark of a well trained teacher.</a:t>
+              <a:t/>
             </a:r>
             <a:endParaRPr lang="en-US" dirty="0"/>
           </a:p>
@@ -4880,7 +4880,7 @@
           <a:p>
             <a:r>
               <a:rPr lang="en-US" dirty="0"/>
-              <a:t>After revealing the answer, ask trainees what they would say to a student who tells them a pose released trapped emotions in their hips. A good answer respects the student's experience: many people do feel emotional in hip openers, and that is real. What we avoid is explaining it with a tissue claim we cannot support. The breath, the vulnerability of the position and the setting may all play a part.</a:t>
+              <a:t/>
             </a:r>
             <a:endParaRPr lang="en-US" dirty="0"/>
           </a:p>
@@ -4968,7 +4968,7 @@
           <a:p>
             <a:r>
               <a:rPr lang="en-US" dirty="0"/>
-              <a:t>The answer is B: Fascia transmits force and contains many sensory nerve endings. Force transmission and rich innervation are well supported; permanent deformation by rolling and emotional storage are not.</a:t>
+              <a:t/>
             </a:r>
             <a:endParaRPr lang="en-US" dirty="0"/>
           </a:p>
@@ -5056,7 +5056,7 @@
           <a:p>
             <a:r>
               <a:rPr lang="en-US" dirty="0"/>
-              <a:t>Lesson 4.7: Pose lab: muscle roles in Warrior III and Bridge. Warrior III is mostly isometric: standing leg, lifted leg and trunk all hold against gravity Standing gluteus medius keeps the pelvis level; a rolling hip signals it needs help Gluteus maximus and hamstrings are agonists on both sides in Warrior III In Bridge the gluteals and hamstrings lift concentrically, hold isometrically and lower eccentrically Adductors stabilize the knees in Bridge; hip flexors are lengthened antagonists Keep the head still in Bridge and reset if the hamstrings cramp</a:t>
+              <a:t/>
             </a:r>
             <a:endParaRPr lang="en-US" dirty="0"/>
           </a:p>
@@ -5144,7 +5144,7 @@
           <a:p>
             <a:r>
               <a:rPr lang="en-US" dirty="0"/>
-              <a:t>Warrior III is a great pose for applying everything in this module because almost everything is working isometrically. On the standing leg, the quadriceps keep the knee straight or slightly soft, and the muscles of the lower leg and foot make constant small balance corrections. At the standing hip, the pelvis has tipped forward over the thigh bone, which is hip flexion. Gravity would pull the trunk further down, so the gluteus maximus and hamstrings of the standing leg control that tilt, eccentrically on the way in and isometrically in the hold. The lifted leg is held at hip height against gravity by the gluteus maximus and hamstrings of that leg. The erector spinae keep the trunk level, and the front of the shoulders holds the arms forward. It is a whole-body isometric pose.</a:t>
+              <a:t/>
             </a:r>
             <a:endParaRPr lang="en-US" dirty="0"/>
           </a:p>
@@ -5232,7 +5232,7 @@
           <a:p>
             <a:r>
               <a:rPr lang="en-US" dirty="0"/>
-              <a:t>Here are the roles side by side. On the standing side, the gluteus maximus and hamstrings are agonists controlling hip flexion, while the gluteus medius is the key stabilizer: it stops the pelvis from dropping on the lifted side. You will see this failing when a student's lifted hip rolls up toward the ceiling and the pelvis twists. The quadriceps and lower leg muscles keep the standing leg stable. On the lifted side, the gluteus maximus and hamstrings are agonists holding hip extension against gravity. The erector spinae hold the spine level, the deep abdominals stiffen the trunk so the back does not sag, and the anterior deltoid holds the arms forward. The hip flexors at the front of the lifted hip are antagonists, lengthened. Notice that the hamstrings are agonists on both sides, but for slightly different reasons.</a:t>
+              <a:t/>
             </a:r>
             <a:endParaRPr lang="en-US" dirty="0"/>
           </a:p>
@@ -5320,7 +5320,7 @@
           <a:p>
             <a:r>
               <a:rPr lang="en-US" dirty="0"/>
-              <a:t>Each part of this cue targets a muscle role without naming a muscle. Pressing down through the standing foot activates the standing leg and gives the balance system a clear base. Reaching back through the lifted heel invites the gluteus maximus and hamstrings to hold the leg up, and the length it creates also helps the back muscles hold the trunk level. Keeping both hip points facing the floor is a cue for the standing gluteus medius and deep hip rotators, which keep the pelvis from opening up toward the ceiling. For students who find balance hard, hands on blocks or on a wall reduce the load on the back muscles and let them focus on the hips. A micro-bend in the standing knee is fine and is usually wiser than locking it.</a:t>
+              <a:t/>
             </a:r>
             <a:endParaRPr lang="en-US" dirty="0"/>
           </a:p>
@@ -5408,7 +5408,7 @@
           <a:p>
             <a:r>
               <a:rPr lang="en-US" dirty="0"/>
-              <a:t>Here is the core idea of muscle contraction, called the sliding filament model. Each sarcomere runs from one Z disc to the next. Thin filaments made of a protein called actin are anchored to the Z discs. Thick filaments made of myosin sit in the middle. When a nerve signal arrives, calcium is released inside the fiber and uncovers binding sites on actin. Myosin heads grab actin, pivot and pull it toward the center, then use ATP, the cell's energy currency, to let go and grab again further along. The Z discs are drawn closer together, so the sarcomere shortens. Notice in the diagram that neither filament gets shorter. They slide past each other, like interlacing your fingers more deeply. Millions of sarcomeres doing this at once shorten the whole muscle.</a:t>
+              <a:t/>
             </a:r>
             <a:endParaRPr lang="en-US" dirty="0"/>
           </a:p>
@@ -5496,7 +5496,7 @@
           <a:p>
             <a:r>
               <a:rPr lang="en-US" dirty="0"/>
-              <a:t>Bridge is a hip extension pose. Lifting the pelvis is concentric work for the gluteus maximus and hamstrings, the agonists. Holding is isometric, and lowering slowly is eccentric for the same muscles. The quadriceps also work, pushing the knees forward over the ankles, and the adductors on the inner thigh act as stabilizers, keeping the knees from drifting apart; a block between the thighs makes that obvious. The erector spinae support the gentle arch in the back. The hip flexors across the front of the hips are the antagonists and are lengthened, which is why Bridge can feel like a stretch at the front of the hips. A common experience is hamstring cramping. The hamstrings are working with the knee bent and the hip extended, a short position where muscles produce less force and cramp more easily. Lower down and reset rather than pushing on.</a:t>
+              <a:t/>
             </a:r>
             <a:endParaRPr lang="en-US" dirty="0"/>
           </a:p>
@@ -5584,7 +5584,7 @@
           <a:p>
             <a:r>
               <a:rPr lang="en-US" dirty="0"/>
-              <a:t>This brings the whole module together. Lift slowly for four counts and feel the buttocks and backs of the thighs shorten: concentric. Hold with steady breathing: isometric, and keep the head still, because the neck is flexed under load in Bridge and turning the head is not advised. Lower for four counts, one part of the spine at a time: eccentric, with the same muscles working as brakes. Then try one variation at a time. Put a block between the thighs and feel the adductors stabilize. Move the feet a little further away and notice whether the hamstrings work harder. If the hamstrings cramp, lower down, extend the legs and try again with a smaller lift. Ask trainees to name the agonist, antagonist and stabilizer they felt.</a:t>
+              <a:t/>
             </a:r>
             <a:endParaRPr lang="en-US" dirty="0"/>
           </a:p>
@@ -5672,7 +5672,7 @@
           <a:p>
             <a:r>
               <a:rPr lang="en-US" dirty="0"/>
-              <a:t>Ask trainees how they would cue this without naming the muscle. Good answers include: keep both hip points facing the floor, or roll the lifted thigh inward slightly so the kneecap faces down. Also note that the hip flexors of the lifted leg are antagonists in this pose, lengthened rather than working as agonists, which makes option two doubly wrong.</a:t>
+              <a:t/>
             </a:r>
             <a:endParaRPr lang="en-US" dirty="0"/>
           </a:p>
@@ -5760,7 +5760,7 @@
           <a:p>
             <a:r>
               <a:rPr lang="en-US" dirty="0"/>
-              <a:t>The answer is A: The standing leg's gluteus medius as a stabilizer. The standing gluteus medius stabilizes the pelvis; when it is not holding, the pelvis rotates and the lifted hip opens toward the ceiling.</a:t>
+              <a:t/>
             </a:r>
             <a:endParaRPr lang="en-US" dirty="0"/>
           </a:p>
@@ -5848,7 +5848,7 @@
           <a:p>
             <a:r>
               <a:rPr lang="en-US" dirty="0"/>
-              <a:t>Key terms for review. Skeletal muscle, Fascicle, Muscle fiber, Myofibril, Sarcomere, Actin and myosin, Motor unit, Concentric contraction, Eccentric contraction, Isometric contraction, Agonist (prime mover)</a:t>
+              <a:t/>
             </a:r>
             <a:endParaRPr lang="en-US" dirty="0"/>
           </a:p>
@@ -5936,7 +5936,7 @@
           <a:p>
             <a:r>
               <a:rPr lang="en-US" dirty="0"/>
-              <a:t>Key terms for review. Antagonist, Synergist, Stabilizer, Muscle spindle, Golgi tendon organ, Stretch reflex, Reciprocal inhibition, PNF stretching, Stretch tolerance, Fascia, Hypermobility</a:t>
+              <a:t/>
             </a:r>
             <a:endParaRPr lang="en-US" dirty="0"/>
           </a:p>
@@ -6024,7 +6024,7 @@
           <a:p>
             <a:r>
               <a:rPr lang="en-US" dirty="0"/>
-              <a:t>Common misconceptions and what is actually true.</a:t>
+              <a:t/>
             </a:r>
             <a:endParaRPr lang="en-US" dirty="0"/>
           </a:p>
@@ -6112,7 +6112,7 @@
           <a:p>
             <a:r>
               <a:rPr lang="en-US" dirty="0"/>
-              <a:t>Wrap up and point trainees to the module resources.</a:t>
+              <a:t/>
             </a:r>
             <a:endParaRPr lang="en-US" dirty="0"/>
           </a:p>
@@ -6200,7 +6200,7 @@
           <a:p>
             <a:r>
               <a:rPr lang="en-US" dirty="0"/>
-              <a:t>If every fiber either contracts or it does not, how do you hold a gentle Tree pose instead of slamming into it? The answer is the motor unit. One motor neuron from the spinal cord branches out to a group of fibers, and when that neuron fires, all of its fibers contract together. Your nervous system grades force in two ways: it recruits more motor units, and it fires them more often. Small motor units come on first, which is why light effort can be very precise. Muscles that need fine control, such as those around the eyes and in the hand, have small motor units. The wobble you feel in the standing ankle in Tree is your nervous system recruiting and releasing small motor units many times a second. That wobble is the balance system working, not failing.</a:t>
+              <a:t/>
             </a:r>
             <a:endParaRPr lang="en-US" dirty="0"/>
           </a:p>
@@ -6288,7 +6288,7 @@
           <a:p>
             <a:r>
               <a:rPr lang="en-US" dirty="0"/>
-              <a:t>There are more than six hundred skeletal muscles in the body, and anatomists still argue about the exact number because it depends on how you count muscles with several parts. The number matters less than one simple rule: muscles only pull. A sarcomere can shorten or be pulled longer, but it cannot actively push itself apart. That is why muscles are arranged in opposing groups. In Chair, the quadriceps on the front of the thigh pull on the shin through the kneecap and its tendon to keep you from sinking. To bend the knee against resistance you need a different muscle, the hamstrings, or you simply let gravity do it. Keep this rule in mind for the rest of the module, because it explains agonists, antagonists and why gravity matters so much in yoga.</a:t>
+              <a:t/>
             </a:r>
             <a:endParaRPr lang="en-US" dirty="0"/>
           </a:p>
@@ -6376,7 +6376,7 @@
           <a:p>
             <a:r>
               <a:rPr lang="en-US" dirty="0"/>
-              <a:t>This takes about a minute and is worth doing with your whole training group. In Mountain, with hands resting on the front of the thighs, the quadriceps usually feel soft, because the knees are straight and the body is stacked over the bones. As soon as the knees bend a little, gravity tries to bend them further and the quadriceps switch on to stop that. Go deeper and they firm up more. What you are feeling is your nervous system recruiting more motor units and firing them faster to meet a bigger load. Then stand back up and feel them soften again. This simple exercise is a good way to show students that muscle effort is not on or off, it is a dimmer switch.</a:t>
+              <a:t/>
             </a:r>
             <a:endParaRPr lang="en-US" dirty="0"/>
           </a:p>
@@ -11612,7 +11612,7 @@
                 <a:ea typeface="Calibri" pitchFamily="34" charset="-122"/>
                 <a:cs typeface="Calibri" pitchFamily="34" charset="-120"/>
               </a:rPr>
-              <a:t>Pause halfway with shoulders at elbow height, hold three breaths: isometric</a:t>
+              <a:t>Pause halfway down and hold for three breaths: isometric</a:t>
             </a:r>
             <a:endParaRPr lang="en-US" sz="1800" dirty="0"/>
           </a:p>
@@ -17134,7 +17134,7 @@
                 <a:ea typeface="Calibri" pitchFamily="34" charset="-122"/>
                 <a:cs typeface="Calibri" pitchFamily="34" charset="-120"/>
               </a:rPr>
-              <a:t>Stand on one leg and hold the lifted knee with both hands</a:t>
+              <a:t>Stand on one leg near a wall, the other foot just off the floor</a:t>
             </a:r>
             <a:endParaRPr lang="en-US" sz="1800" dirty="0"/>
           </a:p>
